--- a/src/DocuChef.TestConsoleApp/files/ppt/template_3.pptx
+++ b/src/DocuChef.TestConsoleApp/files/ppt/template_3.pptx
@@ -5,11 +5,12 @@
     <p:sldMasterId id="2147483648" r:id="rId1"/>
   </p:sldMasterIdLst>
   <p:notesMasterIdLst>
-    <p:notesMasterId r:id="rId4"/>
+    <p:notesMasterId r:id="rId5"/>
   </p:notesMasterIdLst>
   <p:sldIdLst>
     <p:sldId id="256" r:id="rId2"/>
     <p:sldId id="257" r:id="rId3"/>
+    <p:sldId id="258" r:id="rId4"/>
   </p:sldIdLst>
   <p:sldSz cx="12192000" cy="6858000"/>
   <p:notesSz cx="6858000" cy="9144000"/>
@@ -198,7 +199,7 @@
           <a:p>
             <a:fld id="{67FA9472-1DC2-476D-847D-AEF869A08B54}" type="datetimeFigureOut">
               <a:rPr lang="ko-KR" altLang="en-US" smtClean="0"/>
-              <a:t>2025-05-10</a:t>
+              <a:t>2025-05-21</a:t>
             </a:fld>
             <a:endParaRPr lang="ko-KR" altLang="en-US"/>
           </a:p>
@@ -780,7 +781,7 @@
           <a:p>
             <a:fld id="{1BA27EB7-94DC-414F-A9E6-532764B50347}" type="datetimeFigureOut">
               <a:rPr lang="ko-KR" altLang="en-US" smtClean="0"/>
-              <a:t>2025-05-10</a:t>
+              <a:t>2025-05-21</a:t>
             </a:fld>
             <a:endParaRPr lang="ko-KR" altLang="en-US"/>
           </a:p>
@@ -978,7 +979,7 @@
           <a:p>
             <a:fld id="{1BA27EB7-94DC-414F-A9E6-532764B50347}" type="datetimeFigureOut">
               <a:rPr lang="ko-KR" altLang="en-US" smtClean="0"/>
-              <a:t>2025-05-10</a:t>
+              <a:t>2025-05-21</a:t>
             </a:fld>
             <a:endParaRPr lang="ko-KR" altLang="en-US"/>
           </a:p>
@@ -1186,7 +1187,7 @@
           <a:p>
             <a:fld id="{1BA27EB7-94DC-414F-A9E6-532764B50347}" type="datetimeFigureOut">
               <a:rPr lang="ko-KR" altLang="en-US" smtClean="0"/>
-              <a:t>2025-05-10</a:t>
+              <a:t>2025-05-21</a:t>
             </a:fld>
             <a:endParaRPr lang="ko-KR" altLang="en-US"/>
           </a:p>
@@ -1384,7 +1385,7 @@
           <a:p>
             <a:fld id="{1BA27EB7-94DC-414F-A9E6-532764B50347}" type="datetimeFigureOut">
               <a:rPr lang="ko-KR" altLang="en-US" smtClean="0"/>
-              <a:t>2025-05-10</a:t>
+              <a:t>2025-05-21</a:t>
             </a:fld>
             <a:endParaRPr lang="ko-KR" altLang="en-US"/>
           </a:p>
@@ -1659,7 +1660,7 @@
           <a:p>
             <a:fld id="{1BA27EB7-94DC-414F-A9E6-532764B50347}" type="datetimeFigureOut">
               <a:rPr lang="ko-KR" altLang="en-US" smtClean="0"/>
-              <a:t>2025-05-10</a:t>
+              <a:t>2025-05-21</a:t>
             </a:fld>
             <a:endParaRPr lang="ko-KR" altLang="en-US"/>
           </a:p>
@@ -1924,7 +1925,7 @@
           <a:p>
             <a:fld id="{1BA27EB7-94DC-414F-A9E6-532764B50347}" type="datetimeFigureOut">
               <a:rPr lang="ko-KR" altLang="en-US" smtClean="0"/>
-              <a:t>2025-05-10</a:t>
+              <a:t>2025-05-21</a:t>
             </a:fld>
             <a:endParaRPr lang="ko-KR" altLang="en-US"/>
           </a:p>
@@ -2336,7 +2337,7 @@
           <a:p>
             <a:fld id="{1BA27EB7-94DC-414F-A9E6-532764B50347}" type="datetimeFigureOut">
               <a:rPr lang="ko-KR" altLang="en-US" smtClean="0"/>
-              <a:t>2025-05-10</a:t>
+              <a:t>2025-05-21</a:t>
             </a:fld>
             <a:endParaRPr lang="ko-KR" altLang="en-US"/>
           </a:p>
@@ -2477,7 +2478,7 @@
           <a:p>
             <a:fld id="{1BA27EB7-94DC-414F-A9E6-532764B50347}" type="datetimeFigureOut">
               <a:rPr lang="ko-KR" altLang="en-US" smtClean="0"/>
-              <a:t>2025-05-10</a:t>
+              <a:t>2025-05-21</a:t>
             </a:fld>
             <a:endParaRPr lang="ko-KR" altLang="en-US"/>
           </a:p>
@@ -2590,7 +2591,7 @@
           <a:p>
             <a:fld id="{1BA27EB7-94DC-414F-A9E6-532764B50347}" type="datetimeFigureOut">
               <a:rPr lang="ko-KR" altLang="en-US" smtClean="0"/>
-              <a:t>2025-05-10</a:t>
+              <a:t>2025-05-21</a:t>
             </a:fld>
             <a:endParaRPr lang="ko-KR" altLang="en-US"/>
           </a:p>
@@ -2901,7 +2902,7 @@
           <a:p>
             <a:fld id="{1BA27EB7-94DC-414F-A9E6-532764B50347}" type="datetimeFigureOut">
               <a:rPr lang="ko-KR" altLang="en-US" smtClean="0"/>
-              <a:t>2025-05-10</a:t>
+              <a:t>2025-05-21</a:t>
             </a:fld>
             <a:endParaRPr lang="ko-KR" altLang="en-US"/>
           </a:p>
@@ -3189,7 +3190,7 @@
           <a:p>
             <a:fld id="{1BA27EB7-94DC-414F-A9E6-532764B50347}" type="datetimeFigureOut">
               <a:rPr lang="ko-KR" altLang="en-US" smtClean="0"/>
-              <a:t>2025-05-10</a:t>
+              <a:t>2025-05-21</a:t>
             </a:fld>
             <a:endParaRPr lang="ko-KR" altLang="en-US"/>
           </a:p>
@@ -3430,7 +3431,7 @@
           <a:p>
             <a:fld id="{1BA27EB7-94DC-414F-A9E6-532764B50347}" type="datetimeFigureOut">
               <a:rPr lang="ko-KR" altLang="en-US" smtClean="0"/>
-              <a:t>2025-05-10</a:t>
+              <a:t>2025-05-21</a:t>
             </a:fld>
             <a:endParaRPr lang="ko-KR" altLang="en-US"/>
           </a:p>
@@ -4751,6 +4752,91 @@
     <p:extLst>
       <p:ext uri="{BB962C8B-B14F-4D97-AF65-F5344CB8AC3E}">
         <p14:creationId xmlns:p14="http://schemas.microsoft.com/office/powerpoint/2010/main" val="1405707576"/>
+      </p:ext>
+    </p:extLst>
+  </p:cSld>
+  <p:clrMapOvr>
+    <a:masterClrMapping/>
+  </p:clrMapOvr>
+</p:sld>
+</file>
+
+<file path=ppt/slides/slide3.xml><?xml version="1.0" encoding="utf-8"?>
+<p:sld xmlns:a="http://schemas.openxmlformats.org/drawingml/2006/main" xmlns:r="http://schemas.openxmlformats.org/officeDocument/2006/relationships" xmlns:p="http://schemas.openxmlformats.org/presentationml/2006/main">
+  <p:cSld>
+    <p:bg>
+      <p:bgPr>
+        <a:solidFill>
+          <a:schemeClr val="bg2">
+            <a:lumMod val="25000"/>
+          </a:schemeClr>
+        </a:solidFill>
+        <a:effectLst/>
+      </p:bgPr>
+    </p:bg>
+    <p:spTree>
+      <p:nvGrpSpPr>
+        <p:cNvPr id="1" name=""/>
+        <p:cNvGrpSpPr/>
+        <p:nvPr/>
+      </p:nvGrpSpPr>
+      <p:grpSpPr>
+        <a:xfrm>
+          <a:off x="0" y="0"/>
+          <a:ext cx="0" cy="0"/>
+          <a:chOff x="0" y="0"/>
+          <a:chExt cx="0" cy="0"/>
+        </a:xfrm>
+      </p:grpSpPr>
+      <p:sp>
+        <p:nvSpPr>
+          <p:cNvPr id="4" name="TextBox 3">
+            <a:extLst>
+              <a:ext uri="{FF2B5EF4-FFF2-40B4-BE49-F238E27FC236}">
+                <a16:creationId xmlns:a16="http://schemas.microsoft.com/office/drawing/2014/main" id="{1136374D-A1D8-5C5D-9AE4-DC50A50D6C70}"/>
+              </a:ext>
+            </a:extLst>
+          </p:cNvPr>
+          <p:cNvSpPr txBox="1"/>
+          <p:nvPr/>
+        </p:nvSpPr>
+        <p:spPr>
+          <a:xfrm>
+            <a:off x="3837482" y="3044279"/>
+            <a:ext cx="4517036" cy="769441"/>
+          </a:xfrm>
+          <a:prstGeom prst="rect">
+            <a:avLst/>
+          </a:prstGeom>
+          <a:noFill/>
+        </p:spPr>
+        <p:txBody>
+          <a:bodyPr wrap="square" rtlCol="0">
+            <a:spAutoFit/>
+          </a:bodyPr>
+          <a:lstStyle/>
+          <a:p>
+            <a:pPr algn="ctr"/>
+            <a:r>
+              <a:rPr lang="en-US" altLang="ko-KR" sz="4400">
+                <a:solidFill>
+                  <a:schemeClr val="bg1"/>
+                </a:solidFill>
+              </a:rPr>
+              <a:t>END</a:t>
+            </a:r>
+            <a:endParaRPr lang="ko-KR" altLang="en-US">
+              <a:solidFill>
+                <a:schemeClr val="bg1"/>
+              </a:solidFill>
+            </a:endParaRPr>
+          </a:p>
+        </p:txBody>
+      </p:sp>
+    </p:spTree>
+    <p:extLst>
+      <p:ext uri="{BB962C8B-B14F-4D97-AF65-F5344CB8AC3E}">
+        <p14:creationId xmlns:p14="http://schemas.microsoft.com/office/powerpoint/2010/main" val="1105620345"/>
       </p:ext>
     </p:extLst>
   </p:cSld>
